--- a/Regulatory_Framework_Mapper_Architecture.pptx
+++ b/Regulatory_Framework_Mapper_Architecture.pptx
@@ -140,7 +140,7 @@
 <file path=ppt/revisionInfo.xml><?xml version="1.0" encoding="utf-8"?>
 <p1510:revInfo xmlns:a="http://schemas.openxmlformats.org/drawingml/2006/main" xmlns:r="http://schemas.openxmlformats.org/officeDocument/2006/relationships" xmlns:p1510="http://schemas.microsoft.com/office/powerpoint/2015/10/main">
   <p1510:revLst>
-    <p1510:client id="{09E91EFB-81D5-4713-A724-BC97C8524AE6}" v="5" dt="2026-06-24T08:22:44.042"/>
+    <p1510:client id="{09E91EFB-81D5-4713-A724-BC97C8524AE6}" v="17" dt="2026-06-24T16:11:39.722"/>
   </p1510:revLst>
 </p1510:revInfo>
 </file>
@@ -150,7 +150,7 @@
   <pc:docChgLst>
     <pc:chgData name="BRUN Aurélien" userId="acf645f7-0bff-41a6-b08a-20f20e89ac6f" providerId="ADAL" clId="{601CB0BF-2845-4990-8134-FF6226B17901}"/>
     <pc:docChg chg="undo custSel addSld delSld modSld">
-      <pc:chgData name="BRUN Aurélien" userId="acf645f7-0bff-41a6-b08a-20f20e89ac6f" providerId="ADAL" clId="{601CB0BF-2845-4990-8134-FF6226B17901}" dt="2026-06-24T08:22:48.345" v="39" actId="1076"/>
+      <pc:chgData name="BRUN Aurélien" userId="acf645f7-0bff-41a6-b08a-20f20e89ac6f" providerId="ADAL" clId="{601CB0BF-2845-4990-8134-FF6226B17901}" dt="2026-06-24T16:11:39.722" v="64"/>
       <pc:docMkLst>
         <pc:docMk/>
       </pc:docMkLst>
@@ -170,11 +170,35 @@
         </pc:spChg>
       </pc:sldChg>
       <pc:sldChg chg="modSp mod">
-        <pc:chgData name="BRUN Aurélien" userId="acf645f7-0bff-41a6-b08a-20f20e89ac6f" providerId="ADAL" clId="{601CB0BF-2845-4990-8134-FF6226B17901}" dt="2026-06-23T08:50:45.792" v="1" actId="1076"/>
+        <pc:chgData name="BRUN Aurélien" userId="acf645f7-0bff-41a6-b08a-20f20e89ac6f" providerId="ADAL" clId="{601CB0BF-2845-4990-8134-FF6226B17901}" dt="2026-06-24T16:11:39.722" v="64"/>
         <pc:sldMkLst>
           <pc:docMk/>
           <pc:sldMk cId="0" sldId="258"/>
         </pc:sldMkLst>
+        <pc:spChg chg="mod">
+          <ac:chgData name="BRUN Aurélien" userId="acf645f7-0bff-41a6-b08a-20f20e89ac6f" providerId="ADAL" clId="{601CB0BF-2845-4990-8134-FF6226B17901}" dt="2026-06-24T16:11:39.722" v="64"/>
+          <ac:spMkLst>
+            <pc:docMk/>
+            <pc:sldMk cId="0" sldId="258"/>
+            <ac:spMk id="10" creationId="{00000000-0000-0000-0000-000000000000}"/>
+          </ac:spMkLst>
+        </pc:spChg>
+        <pc:spChg chg="mod">
+          <ac:chgData name="BRUN Aurélien" userId="acf645f7-0bff-41a6-b08a-20f20e89ac6f" providerId="ADAL" clId="{601CB0BF-2845-4990-8134-FF6226B17901}" dt="2026-06-24T16:11:27.071" v="61"/>
+          <ac:spMkLst>
+            <pc:docMk/>
+            <pc:sldMk cId="0" sldId="258"/>
+            <ac:spMk id="24" creationId="{00000000-0000-0000-0000-000000000000}"/>
+          </ac:spMkLst>
+        </pc:spChg>
+        <pc:spChg chg="mod">
+          <ac:chgData name="BRUN Aurélien" userId="acf645f7-0bff-41a6-b08a-20f20e89ac6f" providerId="ADAL" clId="{601CB0BF-2845-4990-8134-FF6226B17901}" dt="2026-06-24T16:11:30.850" v="62"/>
+          <ac:spMkLst>
+            <pc:docMk/>
+            <pc:sldMk cId="0" sldId="258"/>
+            <ac:spMk id="38" creationId="{00000000-0000-0000-0000-000000000000}"/>
+          </ac:spMkLst>
+        </pc:spChg>
         <pc:spChg chg="mod">
           <ac:chgData name="BRUN Aurélien" userId="acf645f7-0bff-41a6-b08a-20f20e89ac6f" providerId="ADAL" clId="{601CB0BF-2845-4990-8134-FF6226B17901}" dt="2026-06-23T08:50:45.792" v="1" actId="1076"/>
           <ac:spMkLst>
@@ -183,15 +207,23 @@
             <ac:spMk id="48" creationId="{00000000-0000-0000-0000-000000000000}"/>
           </ac:spMkLst>
         </pc:spChg>
+        <pc:spChg chg="mod">
+          <ac:chgData name="BRUN Aurélien" userId="acf645f7-0bff-41a6-b08a-20f20e89ac6f" providerId="ADAL" clId="{601CB0BF-2845-4990-8134-FF6226B17901}" dt="2026-06-24T16:11:33.132" v="63"/>
+          <ac:spMkLst>
+            <pc:docMk/>
+            <pc:sldMk cId="0" sldId="258"/>
+            <ac:spMk id="52" creationId="{00000000-0000-0000-0000-000000000000}"/>
+          </ac:spMkLst>
+        </pc:spChg>
       </pc:sldChg>
-      <pc:sldChg chg="addSp modSp new mod">
-        <pc:chgData name="BRUN Aurélien" userId="acf645f7-0bff-41a6-b08a-20f20e89ac6f" providerId="ADAL" clId="{601CB0BF-2845-4990-8134-FF6226B17901}" dt="2026-06-24T08:22:48.345" v="39" actId="1076"/>
+      <pc:sldChg chg="addSp delSp modSp new mod">
+        <pc:chgData name="BRUN Aurélien" userId="acf645f7-0bff-41a6-b08a-20f20e89ac6f" providerId="ADAL" clId="{601CB0BF-2845-4990-8134-FF6226B17901}" dt="2026-06-24T16:01:06.517" v="60"/>
         <pc:sldMkLst>
           <pc:docMk/>
           <pc:sldMk cId="174208090" sldId="267"/>
         </pc:sldMkLst>
         <pc:spChg chg="add mod">
-          <ac:chgData name="BRUN Aurélien" userId="acf645f7-0bff-41a6-b08a-20f20e89ac6f" providerId="ADAL" clId="{601CB0BF-2845-4990-8134-FF6226B17901}" dt="2026-06-24T08:22:06.471" v="37" actId="1076"/>
+          <ac:chgData name="BRUN Aurélien" userId="acf645f7-0bff-41a6-b08a-20f20e89ac6f" providerId="ADAL" clId="{601CB0BF-2845-4990-8134-FF6226B17901}" dt="2026-06-24T16:00:37.543" v="57" actId="14100"/>
           <ac:spMkLst>
             <pc:docMk/>
             <pc:sldMk cId="174208090" sldId="267"/>
@@ -199,7 +231,7 @@
           </ac:spMkLst>
         </pc:spChg>
         <pc:spChg chg="add mod">
-          <ac:chgData name="BRUN Aurélien" userId="acf645f7-0bff-41a6-b08a-20f20e89ac6f" providerId="ADAL" clId="{601CB0BF-2845-4990-8134-FF6226B17901}" dt="2026-06-24T08:22:04.334" v="36" actId="1076"/>
+          <ac:chgData name="BRUN Aurélien" userId="acf645f7-0bff-41a6-b08a-20f20e89ac6f" providerId="ADAL" clId="{601CB0BF-2845-4990-8134-FF6226B17901}" dt="2026-06-24T16:00:34.278" v="56" actId="14100"/>
           <ac:spMkLst>
             <pc:docMk/>
             <pc:sldMk cId="174208090" sldId="267"/>
@@ -207,7 +239,7 @@
           </ac:spMkLst>
         </pc:spChg>
         <pc:spChg chg="add mod">
-          <ac:chgData name="BRUN Aurélien" userId="acf645f7-0bff-41a6-b08a-20f20e89ac6f" providerId="ADAL" clId="{601CB0BF-2845-4990-8134-FF6226B17901}" dt="2026-06-24T08:22:48.345" v="39" actId="1076"/>
+          <ac:chgData name="BRUN Aurélien" userId="acf645f7-0bff-41a6-b08a-20f20e89ac6f" providerId="ADAL" clId="{601CB0BF-2845-4990-8134-FF6226B17901}" dt="2026-06-24T16:00:06.362" v="48" actId="164"/>
           <ac:spMkLst>
             <pc:docMk/>
             <pc:sldMk cId="174208090" sldId="267"/>
@@ -215,13 +247,133 @@
           </ac:spMkLst>
         </pc:spChg>
         <pc:spChg chg="add mod">
-          <ac:chgData name="BRUN Aurélien" userId="acf645f7-0bff-41a6-b08a-20f20e89ac6f" providerId="ADAL" clId="{601CB0BF-2845-4990-8134-FF6226B17901}" dt="2026-06-24T08:22:48.345" v="39" actId="1076"/>
+          <ac:chgData name="BRUN Aurélien" userId="acf645f7-0bff-41a6-b08a-20f20e89ac6f" providerId="ADAL" clId="{601CB0BF-2845-4990-8134-FF6226B17901}" dt="2026-06-24T16:00:06.362" v="48" actId="164"/>
           <ac:spMkLst>
             <pc:docMk/>
             <pc:sldMk cId="174208090" sldId="267"/>
             <ac:spMk id="5" creationId="{25E0E4BB-B70A-6054-0004-898E3CDEEEC7}"/>
           </ac:spMkLst>
         </pc:spChg>
+        <pc:spChg chg="add del mod">
+          <ac:chgData name="BRUN Aurélien" userId="acf645f7-0bff-41a6-b08a-20f20e89ac6f" providerId="ADAL" clId="{601CB0BF-2845-4990-8134-FF6226B17901}" dt="2026-06-24T16:00:08.160" v="49" actId="478"/>
+          <ac:spMkLst>
+            <pc:docMk/>
+            <pc:sldMk cId="174208090" sldId="267"/>
+            <ac:spMk id="6" creationId="{2E9A0F6D-1EF5-68FB-2774-CD729B369FF6}"/>
+          </ac:spMkLst>
+        </pc:spChg>
+        <pc:spChg chg="add del mod">
+          <ac:chgData name="BRUN Aurélien" userId="acf645f7-0bff-41a6-b08a-20f20e89ac6f" providerId="ADAL" clId="{601CB0BF-2845-4990-8134-FF6226B17901}" dt="2026-06-24T16:00:08.160" v="49" actId="478"/>
+          <ac:spMkLst>
+            <pc:docMk/>
+            <pc:sldMk cId="174208090" sldId="267"/>
+            <ac:spMk id="7" creationId="{8580629A-4407-4BDE-0EF7-11DA38C121F5}"/>
+          </ac:spMkLst>
+        </pc:spChg>
+        <pc:spChg chg="add del mod">
+          <ac:chgData name="BRUN Aurélien" userId="acf645f7-0bff-41a6-b08a-20f20e89ac6f" providerId="ADAL" clId="{601CB0BF-2845-4990-8134-FF6226B17901}" dt="2026-06-24T16:00:08.160" v="49" actId="478"/>
+          <ac:spMkLst>
+            <pc:docMk/>
+            <pc:sldMk cId="174208090" sldId="267"/>
+            <ac:spMk id="8" creationId="{93623819-ACC0-6ADB-8D66-48D9D8EF2013}"/>
+          </ac:spMkLst>
+        </pc:spChg>
+        <pc:spChg chg="add del mod">
+          <ac:chgData name="BRUN Aurélien" userId="acf645f7-0bff-41a6-b08a-20f20e89ac6f" providerId="ADAL" clId="{601CB0BF-2845-4990-8134-FF6226B17901}" dt="2026-06-24T16:00:08.160" v="49" actId="478"/>
+          <ac:spMkLst>
+            <pc:docMk/>
+            <pc:sldMk cId="174208090" sldId="267"/>
+            <ac:spMk id="9" creationId="{DE0E22F5-A2C9-8027-1DCB-C5E5842EC5B5}"/>
+          </ac:spMkLst>
+        </pc:spChg>
+        <pc:spChg chg="mod">
+          <ac:chgData name="BRUN Aurélien" userId="acf645f7-0bff-41a6-b08a-20f20e89ac6f" providerId="ADAL" clId="{601CB0BF-2845-4990-8134-FF6226B17901}" dt="2026-06-24T16:00:18.737" v="52" actId="571"/>
+          <ac:spMkLst>
+            <pc:docMk/>
+            <pc:sldMk cId="174208090" sldId="267"/>
+            <ac:spMk id="12" creationId="{90B83977-9E69-64C5-879E-C9C651483026}"/>
+          </ac:spMkLst>
+        </pc:spChg>
+        <pc:spChg chg="mod">
+          <ac:chgData name="BRUN Aurélien" userId="acf645f7-0bff-41a6-b08a-20f20e89ac6f" providerId="ADAL" clId="{601CB0BF-2845-4990-8134-FF6226B17901}" dt="2026-06-24T16:00:18.737" v="52" actId="571"/>
+          <ac:spMkLst>
+            <pc:docMk/>
+            <pc:sldMk cId="174208090" sldId="267"/>
+            <ac:spMk id="13" creationId="{1C557F45-5860-F83B-EE0E-B595CC608125}"/>
+          </ac:spMkLst>
+        </pc:spChg>
+        <pc:spChg chg="mod">
+          <ac:chgData name="BRUN Aurélien" userId="acf645f7-0bff-41a6-b08a-20f20e89ac6f" providerId="ADAL" clId="{601CB0BF-2845-4990-8134-FF6226B17901}" dt="2026-06-24T16:00:20.495" v="53" actId="571"/>
+          <ac:spMkLst>
+            <pc:docMk/>
+            <pc:sldMk cId="174208090" sldId="267"/>
+            <ac:spMk id="15" creationId="{31E91F74-D986-19BA-7CFE-7FE33020A9B9}"/>
+          </ac:spMkLst>
+        </pc:spChg>
+        <pc:spChg chg="mod">
+          <ac:chgData name="BRUN Aurélien" userId="acf645f7-0bff-41a6-b08a-20f20e89ac6f" providerId="ADAL" clId="{601CB0BF-2845-4990-8134-FF6226B17901}" dt="2026-06-24T16:00:20.495" v="53" actId="571"/>
+          <ac:spMkLst>
+            <pc:docMk/>
+            <pc:sldMk cId="174208090" sldId="267"/>
+            <ac:spMk id="16" creationId="{F6988973-E851-61EE-2772-6F6A4A578BCC}"/>
+          </ac:spMkLst>
+        </pc:spChg>
+        <pc:spChg chg="mod">
+          <ac:chgData name="BRUN Aurélien" userId="acf645f7-0bff-41a6-b08a-20f20e89ac6f" providerId="ADAL" clId="{601CB0BF-2845-4990-8134-FF6226B17901}" dt="2026-06-24T16:00:28.135" v="55" actId="571"/>
+          <ac:spMkLst>
+            <pc:docMk/>
+            <pc:sldMk cId="174208090" sldId="267"/>
+            <ac:spMk id="18" creationId="{36284AA6-D917-E9ED-22D0-49F4640A4A53}"/>
+          </ac:spMkLst>
+        </pc:spChg>
+        <pc:spChg chg="mod">
+          <ac:chgData name="BRUN Aurélien" userId="acf645f7-0bff-41a6-b08a-20f20e89ac6f" providerId="ADAL" clId="{601CB0BF-2845-4990-8134-FF6226B17901}" dt="2026-06-24T16:00:28.135" v="55" actId="571"/>
+          <ac:spMkLst>
+            <pc:docMk/>
+            <pc:sldMk cId="174208090" sldId="267"/>
+            <ac:spMk id="19" creationId="{BE525AE2-15DB-D3BB-3D93-F0300D5C057B}"/>
+          </ac:spMkLst>
+        </pc:spChg>
+        <pc:spChg chg="add mod">
+          <ac:chgData name="BRUN Aurélien" userId="acf645f7-0bff-41a6-b08a-20f20e89ac6f" providerId="ADAL" clId="{601CB0BF-2845-4990-8134-FF6226B17901}" dt="2026-06-24T16:01:06.517" v="60"/>
+          <ac:spMkLst>
+            <pc:docMk/>
+            <pc:sldMk cId="174208090" sldId="267"/>
+            <ac:spMk id="20" creationId="{D038E530-D6E8-06A1-5813-A7F6531DE3A6}"/>
+          </ac:spMkLst>
+        </pc:spChg>
+        <pc:grpChg chg="add mod">
+          <ac:chgData name="BRUN Aurélien" userId="acf645f7-0bff-41a6-b08a-20f20e89ac6f" providerId="ADAL" clId="{601CB0BF-2845-4990-8134-FF6226B17901}" dt="2026-06-24T16:00:49.204" v="58" actId="1076"/>
+          <ac:grpSpMkLst>
+            <pc:docMk/>
+            <pc:sldMk cId="174208090" sldId="267"/>
+            <ac:grpSpMk id="10" creationId="{1EC03F47-0A36-FFCE-6895-30376D33A895}"/>
+          </ac:grpSpMkLst>
+        </pc:grpChg>
+        <pc:grpChg chg="add mod">
+          <ac:chgData name="BRUN Aurélien" userId="acf645f7-0bff-41a6-b08a-20f20e89ac6f" providerId="ADAL" clId="{601CB0BF-2845-4990-8134-FF6226B17901}" dt="2026-06-24T16:00:49.204" v="58" actId="1076"/>
+          <ac:grpSpMkLst>
+            <pc:docMk/>
+            <pc:sldMk cId="174208090" sldId="267"/>
+            <ac:grpSpMk id="11" creationId="{1CAC8B0E-9B07-4237-EDAF-995395FBB357}"/>
+          </ac:grpSpMkLst>
+        </pc:grpChg>
+        <pc:grpChg chg="add mod">
+          <ac:chgData name="BRUN Aurélien" userId="acf645f7-0bff-41a6-b08a-20f20e89ac6f" providerId="ADAL" clId="{601CB0BF-2845-4990-8134-FF6226B17901}" dt="2026-06-24T16:00:49.204" v="58" actId="1076"/>
+          <ac:grpSpMkLst>
+            <pc:docMk/>
+            <pc:sldMk cId="174208090" sldId="267"/>
+            <ac:grpSpMk id="14" creationId="{6703F8BF-6FEB-2DC0-8F86-B1F5C9E805F3}"/>
+          </ac:grpSpMkLst>
+        </pc:grpChg>
+        <pc:grpChg chg="add mod">
+          <ac:chgData name="BRUN Aurélien" userId="acf645f7-0bff-41a6-b08a-20f20e89ac6f" providerId="ADAL" clId="{601CB0BF-2845-4990-8134-FF6226B17901}" dt="2026-06-24T16:00:49.204" v="58" actId="1076"/>
+          <ac:grpSpMkLst>
+            <pc:docMk/>
+            <pc:sldMk cId="174208090" sldId="267"/>
+            <ac:grpSpMk id="17" creationId="{1E23F178-2FCD-5316-C7EF-F4D0CC34BAEE}"/>
+          </ac:grpSpMkLst>
+        </pc:grpChg>
       </pc:sldChg>
       <pc:sldChg chg="add del setBg">
         <pc:chgData name="BRUN Aurélien" userId="acf645f7-0bff-41a6-b08a-20f20e89ac6f" providerId="ADAL" clId="{601CB0BF-2845-4990-8134-FF6226B17901}" dt="2026-06-24T08:00:34.348" v="7" actId="47"/>
@@ -14300,7 +14452,7 @@
         <p:spPr>
           <a:xfrm>
             <a:off x="841248" y="905256"/>
-            <a:ext cx="1252728" cy="566928"/>
+            <a:ext cx="1252728" cy="246221"/>
           </a:xfrm>
           <a:prstGeom prst="rect">
             <a:avLst/>
@@ -14313,15 +14465,19 @@
           </a:bodyPr>
           <a:lstStyle/>
           <a:p>
-            <a:pPr algn="l"/>
-            <a:r>
-              <a:rPr sz="1000" b="1" i="0">
+            <a:r>
+              <a:rPr lang="en-US" sz="1000" b="1" dirty="0">
                 <a:solidFill>
                   <a:srgbClr val="FFFFFF"/>
                 </a:solidFill>
               </a:rPr>
-              <a:t>Prétraitement</a:t>
-            </a:r>
+              <a:t>Pre-treatment</a:t>
+            </a:r>
+            <a:endParaRPr sz="1000" b="1" i="0" dirty="0">
+              <a:solidFill>
+                <a:srgbClr val="FFFFFF"/>
+              </a:solidFill>
+            </a:endParaRPr>
           </a:p>
         </p:txBody>
       </p:sp>
@@ -14876,7 +15032,7 @@
         <p:spPr>
           <a:xfrm>
             <a:off x="2793492" y="905256"/>
-            <a:ext cx="1252728" cy="566928"/>
+            <a:ext cx="1252728" cy="400110"/>
           </a:xfrm>
           <a:prstGeom prst="rect">
             <a:avLst/>
@@ -14889,15 +15045,19 @@
           </a:bodyPr>
           <a:lstStyle/>
           <a:p>
-            <a:pPr algn="l"/>
-            <a:r>
-              <a:rPr sz="1000" b="1" i="0">
+            <a:r>
+              <a:rPr lang="en-US" sz="1000" b="1" dirty="0">
                 <a:solidFill>
                   <a:srgbClr val="FFFFFF"/>
                 </a:solidFill>
               </a:rPr>
-              <a:t>Mapping directionnel</a:t>
-            </a:r>
+              <a:t>Directional Mapping</a:t>
+            </a:r>
+            <a:endParaRPr sz="1000" b="1" i="0" dirty="0">
+              <a:solidFill>
+                <a:srgbClr val="FFFFFF"/>
+              </a:solidFill>
+            </a:endParaRPr>
           </a:p>
         </p:txBody>
       </p:sp>
@@ -15452,7 +15612,7 @@
         <p:spPr>
           <a:xfrm>
             <a:off x="4745736" y="905256"/>
-            <a:ext cx="1252728" cy="566928"/>
+            <a:ext cx="1252728" cy="246221"/>
           </a:xfrm>
           <a:prstGeom prst="rect">
             <a:avLst/>
@@ -15465,15 +15625,19 @@
           </a:bodyPr>
           <a:lstStyle/>
           <a:p>
-            <a:pPr algn="l"/>
-            <a:r>
-              <a:rPr sz="1000" b="1" i="0">
+            <a:r>
+              <a:rPr lang="en-US" sz="1000" b="1" dirty="0">
                 <a:solidFill>
                   <a:srgbClr val="FFFFFF"/>
                 </a:solidFill>
               </a:rPr>
-              <a:t>Juge final</a:t>
-            </a:r>
+              <a:t>Final Judge</a:t>
+            </a:r>
+            <a:endParaRPr sz="1000" b="1" i="0" dirty="0">
+              <a:solidFill>
+                <a:srgbClr val="FFFFFF"/>
+              </a:solidFill>
+            </a:endParaRPr>
           </a:p>
         </p:txBody>
       </p:sp>
@@ -16027,7 +16191,7 @@
         <p:spPr>
           <a:xfrm>
             <a:off x="6697980" y="905256"/>
-            <a:ext cx="1252728" cy="566928"/>
+            <a:ext cx="1252728" cy="246221"/>
           </a:xfrm>
           <a:prstGeom prst="rect">
             <a:avLst/>
@@ -16040,15 +16204,19 @@
           </a:bodyPr>
           <a:lstStyle/>
           <a:p>
-            <a:pPr algn="l"/>
-            <a:r>
-              <a:rPr sz="1000" b="1" i="0">
+            <a:r>
+              <a:rPr lang="en-US" sz="1000" b="1" dirty="0">
                 <a:solidFill>
                   <a:srgbClr val="FFFFFF"/>
                 </a:solidFill>
               </a:rPr>
-              <a:t>Synthèse parent</a:t>
-            </a:r>
+              <a:t>Parent summary</a:t>
+            </a:r>
+            <a:endParaRPr sz="1000" b="1" i="0" dirty="0">
+              <a:solidFill>
+                <a:srgbClr val="FFFFFF"/>
+              </a:solidFill>
+            </a:endParaRPr>
           </a:p>
         </p:txBody>
       </p:sp>
@@ -18815,13 +18983,18 @@
           <a:p>
             <a:pPr algn="l"/>
             <a:r>
-              <a:rPr sz="1050" b="1" i="0">
+              <a:rPr sz="1050" b="1" i="0" dirty="0" err="1">
                 <a:solidFill>
                   <a:srgbClr val="FFFFFF"/>
                 </a:solidFill>
               </a:rPr>
               <a:t>Atomisation</a:t>
             </a:r>
+            <a:endParaRPr sz="1050" b="1" i="0" dirty="0">
+              <a:solidFill>
+                <a:srgbClr val="FFFFFF"/>
+              </a:solidFill>
+            </a:endParaRPr>
           </a:p>
         </p:txBody>
       </p:sp>
@@ -19554,7 +19727,7 @@
         <p:spPr>
           <a:xfrm>
             <a:off x="619078" y="3583538"/>
-            <a:ext cx="2269748" cy="411480"/>
+            <a:ext cx="1438322" cy="411480"/>
           </a:xfrm>
           <a:prstGeom prst="roundRect">
             <a:avLst/>
@@ -19615,7 +19788,7 @@
         <p:spPr>
           <a:xfrm>
             <a:off x="619078" y="2451503"/>
-            <a:ext cx="2269748" cy="411480"/>
+            <a:ext cx="1438322" cy="411480"/>
           </a:xfrm>
           <a:prstGeom prst="roundRect">
             <a:avLst/>
@@ -19659,207 +19832,894 @@
           </a:p>
         </p:txBody>
       </p:sp>
-      <p:sp>
-        <p:nvSpPr>
-          <p:cNvPr id="4" name="Rounded Rectangle 11">
+      <p:grpSp>
+        <p:nvGrpSpPr>
+          <p:cNvPr id="10" name="Group 9">
             <a:extLst>
               <a:ext uri="{FF2B5EF4-FFF2-40B4-BE49-F238E27FC236}">
-                <a16:creationId xmlns:a16="http://schemas.microsoft.com/office/drawing/2014/main" id="{6C16E600-222D-BF79-65BF-3400CBBCC5E1}"/>
+                <a16:creationId xmlns:a16="http://schemas.microsoft.com/office/drawing/2014/main" id="{1EC03F47-0A36-FFCE-6895-30376D33A895}"/>
               </a:ext>
             </a:extLst>
           </p:cNvPr>
-          <p:cNvSpPr>
-            <a:spLocks/>
-          </p:cNvSpPr>
-          <p:nvPr/>
-        </p:nvSpPr>
-        <p:spPr>
-          <a:xfrm>
-            <a:off x="3382203" y="1518393"/>
-            <a:ext cx="1995841" cy="411480"/>
-          </a:xfrm>
-          <a:prstGeom prst="roundRect">
-            <a:avLst/>
-          </a:prstGeom>
-          <a:solidFill>
-            <a:srgbClr val="EAF3FF"/>
-          </a:solidFill>
-          <a:ln w="15240">
+          <p:cNvGrpSpPr/>
+          <p:nvPr/>
+        </p:nvGrpSpPr>
+        <p:grpSpPr>
+          <a:xfrm>
+            <a:off x="2626830" y="1675079"/>
+            <a:ext cx="1726510" cy="1552848"/>
+            <a:chOff x="3382203" y="1518393"/>
+            <a:chExt cx="1995841" cy="1552848"/>
+          </a:xfrm>
+        </p:grpSpPr>
+        <p:sp>
+          <p:nvSpPr>
+            <p:cNvPr id="4" name="Rounded Rectangle 11">
+              <a:extLst>
+                <a:ext uri="{FF2B5EF4-FFF2-40B4-BE49-F238E27FC236}">
+                  <a16:creationId xmlns:a16="http://schemas.microsoft.com/office/drawing/2014/main" id="{6C16E600-222D-BF79-65BF-3400CBBCC5E1}"/>
+                </a:ext>
+              </a:extLst>
+            </p:cNvPr>
+            <p:cNvSpPr>
+              <a:spLocks/>
+            </p:cNvSpPr>
+            <p:nvPr/>
+          </p:nvSpPr>
+          <p:spPr>
+            <a:xfrm>
+              <a:off x="3382203" y="1518393"/>
+              <a:ext cx="1995841" cy="411480"/>
+            </a:xfrm>
+            <a:prstGeom prst="roundRect">
+              <a:avLst/>
+            </a:prstGeom>
             <a:solidFill>
-              <a:srgbClr val="2072B8"/>
+              <a:srgbClr val="EAF3FF"/>
             </a:solidFill>
-          </a:ln>
-        </p:spPr>
-        <p:style>
-          <a:lnRef idx="1">
-            <a:schemeClr val="accent1"/>
-          </a:lnRef>
-          <a:fillRef idx="3">
-            <a:schemeClr val="accent1"/>
-          </a:fillRef>
-          <a:effectRef idx="2">
-            <a:schemeClr val="accent1"/>
-          </a:effectRef>
-          <a:fontRef idx="minor">
-            <a:schemeClr val="lt1"/>
-          </a:fontRef>
-        </p:style>
-        <p:txBody>
-          <a:bodyPr wrap="square" lIns="127000" tIns="50800" rIns="101600" bIns="50800" rtlCol="0" anchor="ctr"/>
-          <a:lstStyle/>
-          <a:p>
-            <a:pPr algn="l"/>
-            <a:r>
-              <a:rPr lang="en-US" sz="1400" b="1" noProof="0" dirty="0">
-                <a:solidFill>
-                  <a:srgbClr val="2072B8"/>
-                </a:solidFill>
-              </a:rPr>
-              <a:t>Software Supply Chain</a:t>
-            </a:r>
-          </a:p>
-        </p:txBody>
-      </p:sp>
-      <p:sp>
-        <p:nvSpPr>
-          <p:cNvPr id="5" name="Rounded Rectangle 12">
+            <a:ln w="15240">
+              <a:solidFill>
+                <a:srgbClr val="2072B8"/>
+              </a:solidFill>
+            </a:ln>
+          </p:spPr>
+          <p:style>
+            <a:lnRef idx="1">
+              <a:schemeClr val="accent1"/>
+            </a:lnRef>
+            <a:fillRef idx="3">
+              <a:schemeClr val="accent1"/>
+            </a:fillRef>
+            <a:effectRef idx="2">
+              <a:schemeClr val="accent1"/>
+            </a:effectRef>
+            <a:fontRef idx="minor">
+              <a:schemeClr val="lt1"/>
+            </a:fontRef>
+          </p:style>
+          <p:txBody>
+            <a:bodyPr wrap="square" lIns="127000" tIns="50800" rIns="101600" bIns="50800" rtlCol="0" anchor="ctr"/>
+            <a:lstStyle/>
+            <a:p>
+              <a:pPr algn="l"/>
+              <a:r>
+                <a:rPr lang="en-US" sz="1400" b="1" noProof="0" dirty="0">
+                  <a:solidFill>
+                    <a:srgbClr val="2072B8"/>
+                  </a:solidFill>
+                </a:rPr>
+                <a:t>Software Supply Chain</a:t>
+              </a:r>
+            </a:p>
+          </p:txBody>
+        </p:sp>
+        <p:sp>
+          <p:nvSpPr>
+            <p:cNvPr id="5" name="Rounded Rectangle 12">
+              <a:extLst>
+                <a:ext uri="{FF2B5EF4-FFF2-40B4-BE49-F238E27FC236}">
+                  <a16:creationId xmlns:a16="http://schemas.microsoft.com/office/drawing/2014/main" id="{25E0E4BB-B70A-6054-0004-898E3CDEEEC7}"/>
+                </a:ext>
+              </a:extLst>
+            </p:cNvPr>
+            <p:cNvSpPr>
+              <a:spLocks/>
+            </p:cNvSpPr>
+            <p:nvPr/>
+          </p:nvSpPr>
+          <p:spPr>
+            <a:xfrm>
+              <a:off x="3382203" y="1955272"/>
+              <a:ext cx="1995841" cy="1115969"/>
+            </a:xfrm>
+            <a:prstGeom prst="roundRect">
+              <a:avLst/>
+            </a:prstGeom>
+            <a:solidFill>
+              <a:srgbClr val="FFFFFF"/>
+            </a:solidFill>
+            <a:ln w="12700">
+              <a:solidFill>
+                <a:srgbClr val="2072B8"/>
+              </a:solidFill>
+            </a:ln>
+          </p:spPr>
+          <p:style>
+            <a:lnRef idx="1">
+              <a:schemeClr val="accent1"/>
+            </a:lnRef>
+            <a:fillRef idx="3">
+              <a:schemeClr val="accent1"/>
+            </a:fillRef>
+            <a:effectRef idx="2">
+              <a:schemeClr val="accent1"/>
+            </a:effectRef>
+            <a:fontRef idx="minor">
+              <a:schemeClr val="lt1"/>
+            </a:fontRef>
+          </p:style>
+          <p:txBody>
+            <a:bodyPr wrap="square" lIns="127000" tIns="76200" rIns="101600" bIns="50800" rtlCol="0" anchor="ctr">
+              <a:noAutofit/>
+            </a:bodyPr>
+            <a:lstStyle/>
+            <a:p>
+              <a:pPr marL="171450" indent="-171450" algn="l">
+                <a:spcBef>
+                  <a:spcPts val="0"/>
+                </a:spcBef>
+                <a:spcAft>
+                  <a:spcPts val="0"/>
+                </a:spcAft>
+                <a:buFont typeface="Arial" panose="020B0604020202020204" pitchFamily="34" charset="0"/>
+                <a:buChar char="•"/>
+              </a:pPr>
+              <a:r>
+                <a:rPr lang="en-US" sz="1000" noProof="0" dirty="0">
+                  <a:solidFill>
+                    <a:srgbClr val="333333"/>
+                  </a:solidFill>
+                </a:rPr>
+                <a:t>SBOM Management Platform</a:t>
+              </a:r>
+            </a:p>
+            <a:p>
+              <a:pPr marL="171450" indent="-171450" algn="l">
+                <a:spcBef>
+                  <a:spcPts val="0"/>
+                </a:spcBef>
+                <a:spcAft>
+                  <a:spcPts val="0"/>
+                </a:spcAft>
+                <a:buFont typeface="Arial" panose="020B0604020202020204" pitchFamily="34" charset="0"/>
+                <a:buChar char="•"/>
+              </a:pPr>
+              <a:r>
+                <a:rPr lang="en-US" sz="1000" noProof="0" dirty="0">
+                  <a:solidFill>
+                    <a:srgbClr val="333333"/>
+                  </a:solidFill>
+                </a:rPr>
+                <a:t>Software Supply Chain Security</a:t>
+              </a:r>
+            </a:p>
+            <a:p>
+              <a:pPr marL="171450" indent="-171450" algn="l">
+                <a:spcBef>
+                  <a:spcPts val="0"/>
+                </a:spcBef>
+                <a:spcAft>
+                  <a:spcPts val="0"/>
+                </a:spcAft>
+                <a:buFont typeface="Arial" panose="020B0604020202020204" pitchFamily="34" charset="0"/>
+                <a:buChar char="•"/>
+              </a:pPr>
+              <a:r>
+                <a:rPr lang="en-US" sz="1000" noProof="0" dirty="0" err="1">
+                  <a:solidFill>
+                    <a:srgbClr val="333333"/>
+                  </a:solidFill>
+                </a:rPr>
+                <a:t>DevSecOps</a:t>
+              </a:r>
+              <a:r>
+                <a:rPr lang="en-US" sz="1000" noProof="0" dirty="0">
+                  <a:solidFill>
+                    <a:srgbClr val="333333"/>
+                  </a:solidFill>
+                </a:rPr>
+                <a:t> – CI/CD security platform</a:t>
+              </a:r>
+            </a:p>
+            <a:p>
+              <a:pPr marL="171450" indent="-171450" algn="l">
+                <a:spcBef>
+                  <a:spcPts val="0"/>
+                </a:spcBef>
+                <a:spcAft>
+                  <a:spcPts val="0"/>
+                </a:spcAft>
+                <a:buFont typeface="Arial" panose="020B0604020202020204" pitchFamily="34" charset="0"/>
+                <a:buChar char="•"/>
+              </a:pPr>
+              <a:r>
+                <a:rPr lang="en-US" sz="1000" noProof="0" dirty="0">
+                  <a:solidFill>
+                    <a:srgbClr val="333333"/>
+                  </a:solidFill>
+                </a:rPr>
+                <a:t>SCA</a:t>
+              </a:r>
+            </a:p>
+          </p:txBody>
+        </p:sp>
+      </p:grpSp>
+      <p:grpSp>
+        <p:nvGrpSpPr>
+          <p:cNvPr id="11" name="Group 10">
             <a:extLst>
               <a:ext uri="{FF2B5EF4-FFF2-40B4-BE49-F238E27FC236}">
-                <a16:creationId xmlns:a16="http://schemas.microsoft.com/office/drawing/2014/main" id="{25E0E4BB-B70A-6054-0004-898E3CDEEEC7}"/>
+                <a16:creationId xmlns:a16="http://schemas.microsoft.com/office/drawing/2014/main" id="{1CAC8B0E-9B07-4237-EDAF-995395FBB357}"/>
               </a:ext>
             </a:extLst>
           </p:cNvPr>
-          <p:cNvSpPr>
-            <a:spLocks/>
-          </p:cNvSpPr>
-          <p:nvPr/>
-        </p:nvSpPr>
-        <p:spPr>
-          <a:xfrm>
-            <a:off x="3382203" y="1955272"/>
-            <a:ext cx="1995841" cy="1115969"/>
-          </a:xfrm>
-          <a:prstGeom prst="roundRect">
-            <a:avLst/>
-          </a:prstGeom>
-          <a:solidFill>
-            <a:srgbClr val="FFFFFF"/>
-          </a:solidFill>
-          <a:ln w="12700">
+          <p:cNvGrpSpPr/>
+          <p:nvPr/>
+        </p:nvGrpSpPr>
+        <p:grpSpPr>
+          <a:xfrm>
+            <a:off x="4694169" y="1675079"/>
+            <a:ext cx="1726510" cy="1552848"/>
+            <a:chOff x="3382203" y="1518393"/>
+            <a:chExt cx="1995841" cy="1552848"/>
+          </a:xfrm>
+        </p:grpSpPr>
+        <p:sp>
+          <p:nvSpPr>
+            <p:cNvPr id="12" name="Rounded Rectangle 11">
+              <a:extLst>
+                <a:ext uri="{FF2B5EF4-FFF2-40B4-BE49-F238E27FC236}">
+                  <a16:creationId xmlns:a16="http://schemas.microsoft.com/office/drawing/2014/main" id="{90B83977-9E69-64C5-879E-C9C651483026}"/>
+                </a:ext>
+              </a:extLst>
+            </p:cNvPr>
+            <p:cNvSpPr>
+              <a:spLocks/>
+            </p:cNvSpPr>
+            <p:nvPr/>
+          </p:nvSpPr>
+          <p:spPr>
+            <a:xfrm>
+              <a:off x="3382203" y="1518393"/>
+              <a:ext cx="1995841" cy="411480"/>
+            </a:xfrm>
+            <a:prstGeom prst="roundRect">
+              <a:avLst/>
+            </a:prstGeom>
             <a:solidFill>
-              <a:srgbClr val="2072B8"/>
+              <a:srgbClr val="EAF3FF"/>
             </a:solidFill>
-          </a:ln>
-        </p:spPr>
-        <p:style>
-          <a:lnRef idx="1">
-            <a:schemeClr val="accent1"/>
-          </a:lnRef>
-          <a:fillRef idx="3">
-            <a:schemeClr val="accent1"/>
-          </a:fillRef>
-          <a:effectRef idx="2">
-            <a:schemeClr val="accent1"/>
-          </a:effectRef>
-          <a:fontRef idx="minor">
-            <a:schemeClr val="lt1"/>
-          </a:fontRef>
-        </p:style>
-        <p:txBody>
-          <a:bodyPr wrap="square" lIns="127000" tIns="76200" rIns="101600" bIns="50800" rtlCol="0" anchor="ctr">
-            <a:noAutofit/>
-          </a:bodyPr>
-          <a:lstStyle/>
-          <a:p>
-            <a:pPr marL="171450" indent="-171450" algn="l">
-              <a:spcBef>
-                <a:spcPts val="0"/>
-              </a:spcBef>
-              <a:spcAft>
-                <a:spcPts val="0"/>
-              </a:spcAft>
-              <a:buFont typeface="Arial" panose="020B0604020202020204" pitchFamily="34" charset="0"/>
-              <a:buChar char="•"/>
-            </a:pPr>
-            <a:r>
-              <a:rPr lang="en-US" sz="1000" noProof="0">
-                <a:solidFill>
-                  <a:srgbClr val="333333"/>
-                </a:solidFill>
-              </a:rPr>
-              <a:t>SBOM Management Platform</a:t>
-            </a:r>
-          </a:p>
-          <a:p>
-            <a:pPr marL="171450" indent="-171450" algn="l">
-              <a:spcBef>
-                <a:spcPts val="0"/>
-              </a:spcBef>
-              <a:spcAft>
-                <a:spcPts val="0"/>
-              </a:spcAft>
-              <a:buFont typeface="Arial" panose="020B0604020202020204" pitchFamily="34" charset="0"/>
-              <a:buChar char="•"/>
-            </a:pPr>
-            <a:r>
-              <a:rPr lang="en-US" sz="1000" noProof="0">
-                <a:solidFill>
-                  <a:srgbClr val="333333"/>
-                </a:solidFill>
-              </a:rPr>
-              <a:t>Software Supply Chain Security</a:t>
-            </a:r>
-          </a:p>
-          <a:p>
-            <a:pPr marL="171450" indent="-171450" algn="l">
-              <a:spcBef>
-                <a:spcPts val="0"/>
-              </a:spcBef>
-              <a:spcAft>
-                <a:spcPts val="0"/>
-              </a:spcAft>
-              <a:buFont typeface="Arial" panose="020B0604020202020204" pitchFamily="34" charset="0"/>
-              <a:buChar char="•"/>
-            </a:pPr>
-            <a:r>
-              <a:rPr lang="en-US" sz="1000" noProof="0" err="1">
-                <a:solidFill>
-                  <a:srgbClr val="333333"/>
-                </a:solidFill>
-              </a:rPr>
-              <a:t>DevSecOps</a:t>
-            </a:r>
-            <a:r>
-              <a:rPr lang="en-US" sz="1000" noProof="0">
-                <a:solidFill>
-                  <a:srgbClr val="333333"/>
-                </a:solidFill>
-              </a:rPr>
-              <a:t> – CI/CD security platform</a:t>
-            </a:r>
-          </a:p>
-          <a:p>
-            <a:pPr marL="171450" indent="-171450" algn="l">
-              <a:spcBef>
-                <a:spcPts val="0"/>
-              </a:spcBef>
-              <a:spcAft>
-                <a:spcPts val="0"/>
-              </a:spcAft>
-              <a:buFont typeface="Arial" panose="020B0604020202020204" pitchFamily="34" charset="0"/>
-              <a:buChar char="•"/>
-            </a:pPr>
-            <a:r>
-              <a:rPr lang="en-US" sz="1000" noProof="0">
-                <a:solidFill>
-                  <a:srgbClr val="333333"/>
-                </a:solidFill>
-              </a:rPr>
-              <a:t>SCA</a:t>
-            </a:r>
-          </a:p>
-        </p:txBody>
-      </p:sp>
+            <a:ln w="15240">
+              <a:solidFill>
+                <a:srgbClr val="2072B8"/>
+              </a:solidFill>
+            </a:ln>
+          </p:spPr>
+          <p:style>
+            <a:lnRef idx="1">
+              <a:schemeClr val="accent1"/>
+            </a:lnRef>
+            <a:fillRef idx="3">
+              <a:schemeClr val="accent1"/>
+            </a:fillRef>
+            <a:effectRef idx="2">
+              <a:schemeClr val="accent1"/>
+            </a:effectRef>
+            <a:fontRef idx="minor">
+              <a:schemeClr val="lt1"/>
+            </a:fontRef>
+          </p:style>
+          <p:txBody>
+            <a:bodyPr wrap="square" lIns="127000" tIns="50800" rIns="101600" bIns="50800" rtlCol="0" anchor="ctr"/>
+            <a:lstStyle/>
+            <a:p>
+              <a:pPr algn="l"/>
+              <a:r>
+                <a:rPr lang="en-US" sz="1400" b="1" noProof="0" dirty="0">
+                  <a:solidFill>
+                    <a:srgbClr val="2072B8"/>
+                  </a:solidFill>
+                </a:rPr>
+                <a:t>Software Supply Chain</a:t>
+              </a:r>
+            </a:p>
+          </p:txBody>
+        </p:sp>
+        <p:sp>
+          <p:nvSpPr>
+            <p:cNvPr id="13" name="Rounded Rectangle 12">
+              <a:extLst>
+                <a:ext uri="{FF2B5EF4-FFF2-40B4-BE49-F238E27FC236}">
+                  <a16:creationId xmlns:a16="http://schemas.microsoft.com/office/drawing/2014/main" id="{1C557F45-5860-F83B-EE0E-B595CC608125}"/>
+                </a:ext>
+              </a:extLst>
+            </p:cNvPr>
+            <p:cNvSpPr>
+              <a:spLocks/>
+            </p:cNvSpPr>
+            <p:nvPr/>
+          </p:nvSpPr>
+          <p:spPr>
+            <a:xfrm>
+              <a:off x="3382203" y="1955272"/>
+              <a:ext cx="1995841" cy="1115969"/>
+            </a:xfrm>
+            <a:prstGeom prst="roundRect">
+              <a:avLst/>
+            </a:prstGeom>
+            <a:solidFill>
+              <a:srgbClr val="FFFFFF"/>
+            </a:solidFill>
+            <a:ln w="12700">
+              <a:solidFill>
+                <a:srgbClr val="2072B8"/>
+              </a:solidFill>
+            </a:ln>
+          </p:spPr>
+          <p:style>
+            <a:lnRef idx="1">
+              <a:schemeClr val="accent1"/>
+            </a:lnRef>
+            <a:fillRef idx="3">
+              <a:schemeClr val="accent1"/>
+            </a:fillRef>
+            <a:effectRef idx="2">
+              <a:schemeClr val="accent1"/>
+            </a:effectRef>
+            <a:fontRef idx="minor">
+              <a:schemeClr val="lt1"/>
+            </a:fontRef>
+          </p:style>
+          <p:txBody>
+            <a:bodyPr wrap="square" lIns="127000" tIns="76200" rIns="101600" bIns="50800" rtlCol="0" anchor="ctr">
+              <a:noAutofit/>
+            </a:bodyPr>
+            <a:lstStyle/>
+            <a:p>
+              <a:pPr marL="171450" indent="-171450" algn="l">
+                <a:spcBef>
+                  <a:spcPts val="0"/>
+                </a:spcBef>
+                <a:spcAft>
+                  <a:spcPts val="0"/>
+                </a:spcAft>
+                <a:buFont typeface="Arial" panose="020B0604020202020204" pitchFamily="34" charset="0"/>
+                <a:buChar char="•"/>
+              </a:pPr>
+              <a:r>
+                <a:rPr lang="en-US" sz="1000" noProof="0" dirty="0">
+                  <a:solidFill>
+                    <a:srgbClr val="333333"/>
+                  </a:solidFill>
+                </a:rPr>
+                <a:t>SBOM Management Platform</a:t>
+              </a:r>
+            </a:p>
+            <a:p>
+              <a:pPr marL="171450" indent="-171450" algn="l">
+                <a:spcBef>
+                  <a:spcPts val="0"/>
+                </a:spcBef>
+                <a:spcAft>
+                  <a:spcPts val="0"/>
+                </a:spcAft>
+                <a:buFont typeface="Arial" panose="020B0604020202020204" pitchFamily="34" charset="0"/>
+                <a:buChar char="•"/>
+              </a:pPr>
+              <a:r>
+                <a:rPr lang="en-US" sz="1000" noProof="0" dirty="0">
+                  <a:solidFill>
+                    <a:srgbClr val="333333"/>
+                  </a:solidFill>
+                </a:rPr>
+                <a:t>Software Supply Chain Security</a:t>
+              </a:r>
+            </a:p>
+            <a:p>
+              <a:pPr marL="171450" indent="-171450" algn="l">
+                <a:spcBef>
+                  <a:spcPts val="0"/>
+                </a:spcBef>
+                <a:spcAft>
+                  <a:spcPts val="0"/>
+                </a:spcAft>
+                <a:buFont typeface="Arial" panose="020B0604020202020204" pitchFamily="34" charset="0"/>
+                <a:buChar char="•"/>
+              </a:pPr>
+              <a:r>
+                <a:rPr lang="en-US" sz="1000" noProof="0" dirty="0" err="1">
+                  <a:solidFill>
+                    <a:srgbClr val="333333"/>
+                  </a:solidFill>
+                </a:rPr>
+                <a:t>DevSecOps</a:t>
+              </a:r>
+              <a:r>
+                <a:rPr lang="en-US" sz="1000" noProof="0" dirty="0">
+                  <a:solidFill>
+                    <a:srgbClr val="333333"/>
+                  </a:solidFill>
+                </a:rPr>
+                <a:t> – CI/CD security platform</a:t>
+              </a:r>
+            </a:p>
+            <a:p>
+              <a:pPr marL="171450" indent="-171450" algn="l">
+                <a:spcBef>
+                  <a:spcPts val="0"/>
+                </a:spcBef>
+                <a:spcAft>
+                  <a:spcPts val="0"/>
+                </a:spcAft>
+                <a:buFont typeface="Arial" panose="020B0604020202020204" pitchFamily="34" charset="0"/>
+                <a:buChar char="•"/>
+              </a:pPr>
+              <a:r>
+                <a:rPr lang="en-US" sz="1000" noProof="0" dirty="0">
+                  <a:solidFill>
+                    <a:srgbClr val="333333"/>
+                  </a:solidFill>
+                </a:rPr>
+                <a:t>SCA</a:t>
+              </a:r>
+            </a:p>
+          </p:txBody>
+        </p:sp>
+      </p:grpSp>
+      <p:grpSp>
+        <p:nvGrpSpPr>
+          <p:cNvPr id="14" name="Group 13">
+            <a:extLst>
+              <a:ext uri="{FF2B5EF4-FFF2-40B4-BE49-F238E27FC236}">
+                <a16:creationId xmlns:a16="http://schemas.microsoft.com/office/drawing/2014/main" id="{6703F8BF-6FEB-2DC0-8F86-B1F5C9E805F3}"/>
+              </a:ext>
+            </a:extLst>
+          </p:cNvPr>
+          <p:cNvGrpSpPr/>
+          <p:nvPr/>
+        </p:nvGrpSpPr>
+        <p:grpSpPr>
+          <a:xfrm>
+            <a:off x="8769212" y="1675079"/>
+            <a:ext cx="1726510" cy="1552848"/>
+            <a:chOff x="3382203" y="1518393"/>
+            <a:chExt cx="1995841" cy="1552848"/>
+          </a:xfrm>
+        </p:grpSpPr>
+        <p:sp>
+          <p:nvSpPr>
+            <p:cNvPr id="15" name="Rounded Rectangle 11">
+              <a:extLst>
+                <a:ext uri="{FF2B5EF4-FFF2-40B4-BE49-F238E27FC236}">
+                  <a16:creationId xmlns:a16="http://schemas.microsoft.com/office/drawing/2014/main" id="{31E91F74-D986-19BA-7CFE-7FE33020A9B9}"/>
+                </a:ext>
+              </a:extLst>
+            </p:cNvPr>
+            <p:cNvSpPr>
+              <a:spLocks/>
+            </p:cNvSpPr>
+            <p:nvPr/>
+          </p:nvSpPr>
+          <p:spPr>
+            <a:xfrm>
+              <a:off x="3382203" y="1518393"/>
+              <a:ext cx="1995841" cy="411480"/>
+            </a:xfrm>
+            <a:prstGeom prst="roundRect">
+              <a:avLst/>
+            </a:prstGeom>
+            <a:solidFill>
+              <a:srgbClr val="EAF3FF"/>
+            </a:solidFill>
+            <a:ln w="15240">
+              <a:solidFill>
+                <a:srgbClr val="2072B8"/>
+              </a:solidFill>
+            </a:ln>
+          </p:spPr>
+          <p:style>
+            <a:lnRef idx="1">
+              <a:schemeClr val="accent1"/>
+            </a:lnRef>
+            <a:fillRef idx="3">
+              <a:schemeClr val="accent1"/>
+            </a:fillRef>
+            <a:effectRef idx="2">
+              <a:schemeClr val="accent1"/>
+            </a:effectRef>
+            <a:fontRef idx="minor">
+              <a:schemeClr val="lt1"/>
+            </a:fontRef>
+          </p:style>
+          <p:txBody>
+            <a:bodyPr wrap="square" lIns="127000" tIns="50800" rIns="101600" bIns="50800" rtlCol="0" anchor="ctr"/>
+            <a:lstStyle/>
+            <a:p>
+              <a:pPr algn="l"/>
+              <a:r>
+                <a:rPr lang="en-US" sz="1400" b="1" noProof="0" dirty="0">
+                  <a:solidFill>
+                    <a:srgbClr val="2072B8"/>
+                  </a:solidFill>
+                </a:rPr>
+                <a:t>Software Supply Chain</a:t>
+              </a:r>
+            </a:p>
+          </p:txBody>
+        </p:sp>
+        <p:sp>
+          <p:nvSpPr>
+            <p:cNvPr id="16" name="Rounded Rectangle 12">
+              <a:extLst>
+                <a:ext uri="{FF2B5EF4-FFF2-40B4-BE49-F238E27FC236}">
+                  <a16:creationId xmlns:a16="http://schemas.microsoft.com/office/drawing/2014/main" id="{F6988973-E851-61EE-2772-6F6A4A578BCC}"/>
+                </a:ext>
+              </a:extLst>
+            </p:cNvPr>
+            <p:cNvSpPr>
+              <a:spLocks/>
+            </p:cNvSpPr>
+            <p:nvPr/>
+          </p:nvSpPr>
+          <p:spPr>
+            <a:xfrm>
+              <a:off x="3382203" y="1955272"/>
+              <a:ext cx="1995841" cy="1115969"/>
+            </a:xfrm>
+            <a:prstGeom prst="roundRect">
+              <a:avLst/>
+            </a:prstGeom>
+            <a:solidFill>
+              <a:srgbClr val="FFFFFF"/>
+            </a:solidFill>
+            <a:ln w="12700">
+              <a:solidFill>
+                <a:srgbClr val="2072B8"/>
+              </a:solidFill>
+            </a:ln>
+          </p:spPr>
+          <p:style>
+            <a:lnRef idx="1">
+              <a:schemeClr val="accent1"/>
+            </a:lnRef>
+            <a:fillRef idx="3">
+              <a:schemeClr val="accent1"/>
+            </a:fillRef>
+            <a:effectRef idx="2">
+              <a:schemeClr val="accent1"/>
+            </a:effectRef>
+            <a:fontRef idx="minor">
+              <a:schemeClr val="lt1"/>
+            </a:fontRef>
+          </p:style>
+          <p:txBody>
+            <a:bodyPr wrap="square" lIns="127000" tIns="76200" rIns="101600" bIns="50800" rtlCol="0" anchor="ctr">
+              <a:noAutofit/>
+            </a:bodyPr>
+            <a:lstStyle/>
+            <a:p>
+              <a:pPr marL="171450" indent="-171450" algn="l">
+                <a:spcBef>
+                  <a:spcPts val="0"/>
+                </a:spcBef>
+                <a:spcAft>
+                  <a:spcPts val="0"/>
+                </a:spcAft>
+                <a:buFont typeface="Arial" panose="020B0604020202020204" pitchFamily="34" charset="0"/>
+                <a:buChar char="•"/>
+              </a:pPr>
+              <a:r>
+                <a:rPr lang="en-US" sz="1000" noProof="0" dirty="0">
+                  <a:solidFill>
+                    <a:srgbClr val="333333"/>
+                  </a:solidFill>
+                </a:rPr>
+                <a:t>SBOM Management Platform</a:t>
+              </a:r>
+            </a:p>
+            <a:p>
+              <a:pPr marL="171450" indent="-171450" algn="l">
+                <a:spcBef>
+                  <a:spcPts val="0"/>
+                </a:spcBef>
+                <a:spcAft>
+                  <a:spcPts val="0"/>
+                </a:spcAft>
+                <a:buFont typeface="Arial" panose="020B0604020202020204" pitchFamily="34" charset="0"/>
+                <a:buChar char="•"/>
+              </a:pPr>
+              <a:r>
+                <a:rPr lang="en-US" sz="1000" noProof="0" dirty="0">
+                  <a:solidFill>
+                    <a:srgbClr val="333333"/>
+                  </a:solidFill>
+                </a:rPr>
+                <a:t>Software Supply Chain Security</a:t>
+              </a:r>
+            </a:p>
+            <a:p>
+              <a:pPr marL="171450" indent="-171450" algn="l">
+                <a:spcBef>
+                  <a:spcPts val="0"/>
+                </a:spcBef>
+                <a:spcAft>
+                  <a:spcPts val="0"/>
+                </a:spcAft>
+                <a:buFont typeface="Arial" panose="020B0604020202020204" pitchFamily="34" charset="0"/>
+                <a:buChar char="•"/>
+              </a:pPr>
+              <a:r>
+                <a:rPr lang="en-US" sz="1000" noProof="0" dirty="0" err="1">
+                  <a:solidFill>
+                    <a:srgbClr val="333333"/>
+                  </a:solidFill>
+                </a:rPr>
+                <a:t>DevSecOps</a:t>
+              </a:r>
+              <a:r>
+                <a:rPr lang="en-US" sz="1000" noProof="0" dirty="0">
+                  <a:solidFill>
+                    <a:srgbClr val="333333"/>
+                  </a:solidFill>
+                </a:rPr>
+                <a:t> – CI/CD security platform</a:t>
+              </a:r>
+            </a:p>
+            <a:p>
+              <a:pPr marL="171450" indent="-171450" algn="l">
+                <a:spcBef>
+                  <a:spcPts val="0"/>
+                </a:spcBef>
+                <a:spcAft>
+                  <a:spcPts val="0"/>
+                </a:spcAft>
+                <a:buFont typeface="Arial" panose="020B0604020202020204" pitchFamily="34" charset="0"/>
+                <a:buChar char="•"/>
+              </a:pPr>
+              <a:r>
+                <a:rPr lang="en-US" sz="1000" noProof="0" dirty="0">
+                  <a:solidFill>
+                    <a:srgbClr val="333333"/>
+                  </a:solidFill>
+                </a:rPr>
+                <a:t>SCA</a:t>
+              </a:r>
+            </a:p>
+          </p:txBody>
+        </p:sp>
+      </p:grpSp>
+      <p:grpSp>
+        <p:nvGrpSpPr>
+          <p:cNvPr id="17" name="Group 16">
+            <a:extLst>
+              <a:ext uri="{FF2B5EF4-FFF2-40B4-BE49-F238E27FC236}">
+                <a16:creationId xmlns:a16="http://schemas.microsoft.com/office/drawing/2014/main" id="{1E23F178-2FCD-5316-C7EF-F4D0CC34BAEE}"/>
+              </a:ext>
+            </a:extLst>
+          </p:cNvPr>
+          <p:cNvGrpSpPr/>
+          <p:nvPr/>
+        </p:nvGrpSpPr>
+        <p:grpSpPr>
+          <a:xfrm>
+            <a:off x="6592542" y="1675079"/>
+            <a:ext cx="1726510" cy="1552848"/>
+            <a:chOff x="3382203" y="1518393"/>
+            <a:chExt cx="1995841" cy="1552848"/>
+          </a:xfrm>
+        </p:grpSpPr>
+        <p:sp>
+          <p:nvSpPr>
+            <p:cNvPr id="18" name="Rounded Rectangle 11">
+              <a:extLst>
+                <a:ext uri="{FF2B5EF4-FFF2-40B4-BE49-F238E27FC236}">
+                  <a16:creationId xmlns:a16="http://schemas.microsoft.com/office/drawing/2014/main" id="{36284AA6-D917-E9ED-22D0-49F4640A4A53}"/>
+                </a:ext>
+              </a:extLst>
+            </p:cNvPr>
+            <p:cNvSpPr>
+              <a:spLocks/>
+            </p:cNvSpPr>
+            <p:nvPr/>
+          </p:nvSpPr>
+          <p:spPr>
+            <a:xfrm>
+              <a:off x="3382203" y="1518393"/>
+              <a:ext cx="1995841" cy="411480"/>
+            </a:xfrm>
+            <a:prstGeom prst="roundRect">
+              <a:avLst/>
+            </a:prstGeom>
+            <a:solidFill>
+              <a:srgbClr val="EAF3FF"/>
+            </a:solidFill>
+            <a:ln w="15240">
+              <a:solidFill>
+                <a:srgbClr val="2072B8"/>
+              </a:solidFill>
+            </a:ln>
+          </p:spPr>
+          <p:style>
+            <a:lnRef idx="1">
+              <a:schemeClr val="accent1"/>
+            </a:lnRef>
+            <a:fillRef idx="3">
+              <a:schemeClr val="accent1"/>
+            </a:fillRef>
+            <a:effectRef idx="2">
+              <a:schemeClr val="accent1"/>
+            </a:effectRef>
+            <a:fontRef idx="minor">
+              <a:schemeClr val="lt1"/>
+            </a:fontRef>
+          </p:style>
+          <p:txBody>
+            <a:bodyPr wrap="square" lIns="127000" tIns="50800" rIns="101600" bIns="50800" rtlCol="0" anchor="ctr"/>
+            <a:lstStyle/>
+            <a:p>
+              <a:pPr algn="l"/>
+              <a:r>
+                <a:rPr lang="en-US" sz="1400" b="1" noProof="0" dirty="0">
+                  <a:solidFill>
+                    <a:srgbClr val="2072B8"/>
+                  </a:solidFill>
+                </a:rPr>
+                <a:t>Software Supply Chain</a:t>
+              </a:r>
+            </a:p>
+          </p:txBody>
+        </p:sp>
+        <p:sp>
+          <p:nvSpPr>
+            <p:cNvPr id="19" name="Rounded Rectangle 12">
+              <a:extLst>
+                <a:ext uri="{FF2B5EF4-FFF2-40B4-BE49-F238E27FC236}">
+                  <a16:creationId xmlns:a16="http://schemas.microsoft.com/office/drawing/2014/main" id="{BE525AE2-15DB-D3BB-3D93-F0300D5C057B}"/>
+                </a:ext>
+              </a:extLst>
+            </p:cNvPr>
+            <p:cNvSpPr>
+              <a:spLocks/>
+            </p:cNvSpPr>
+            <p:nvPr/>
+          </p:nvSpPr>
+          <p:spPr>
+            <a:xfrm>
+              <a:off x="3382203" y="1955272"/>
+              <a:ext cx="1995841" cy="1115969"/>
+            </a:xfrm>
+            <a:prstGeom prst="roundRect">
+              <a:avLst/>
+            </a:prstGeom>
+            <a:solidFill>
+              <a:srgbClr val="FFFFFF"/>
+            </a:solidFill>
+            <a:ln w="12700">
+              <a:solidFill>
+                <a:srgbClr val="2072B8"/>
+              </a:solidFill>
+            </a:ln>
+          </p:spPr>
+          <p:style>
+            <a:lnRef idx="1">
+              <a:schemeClr val="accent1"/>
+            </a:lnRef>
+            <a:fillRef idx="3">
+              <a:schemeClr val="accent1"/>
+            </a:fillRef>
+            <a:effectRef idx="2">
+              <a:schemeClr val="accent1"/>
+            </a:effectRef>
+            <a:fontRef idx="minor">
+              <a:schemeClr val="lt1"/>
+            </a:fontRef>
+          </p:style>
+          <p:txBody>
+            <a:bodyPr wrap="square" lIns="127000" tIns="76200" rIns="101600" bIns="50800" rtlCol="0" anchor="ctr">
+              <a:noAutofit/>
+            </a:bodyPr>
+            <a:lstStyle/>
+            <a:p>
+              <a:pPr marL="171450" indent="-171450" algn="l">
+                <a:spcBef>
+                  <a:spcPts val="0"/>
+                </a:spcBef>
+                <a:spcAft>
+                  <a:spcPts val="0"/>
+                </a:spcAft>
+                <a:buFont typeface="Arial" panose="020B0604020202020204" pitchFamily="34" charset="0"/>
+                <a:buChar char="•"/>
+              </a:pPr>
+              <a:r>
+                <a:rPr lang="en-US" sz="1000" noProof="0" dirty="0">
+                  <a:solidFill>
+                    <a:srgbClr val="333333"/>
+                  </a:solidFill>
+                </a:rPr>
+                <a:t>SBOM Management Platform</a:t>
+              </a:r>
+            </a:p>
+            <a:p>
+              <a:pPr marL="171450" indent="-171450" algn="l">
+                <a:spcBef>
+                  <a:spcPts val="0"/>
+                </a:spcBef>
+                <a:spcAft>
+                  <a:spcPts val="0"/>
+                </a:spcAft>
+                <a:buFont typeface="Arial" panose="020B0604020202020204" pitchFamily="34" charset="0"/>
+                <a:buChar char="•"/>
+              </a:pPr>
+              <a:r>
+                <a:rPr lang="en-US" sz="1000" noProof="0" dirty="0">
+                  <a:solidFill>
+                    <a:srgbClr val="333333"/>
+                  </a:solidFill>
+                </a:rPr>
+                <a:t>Software Supply Chain Security</a:t>
+              </a:r>
+            </a:p>
+            <a:p>
+              <a:pPr marL="171450" indent="-171450" algn="l">
+                <a:spcBef>
+                  <a:spcPts val="0"/>
+                </a:spcBef>
+                <a:spcAft>
+                  <a:spcPts val="0"/>
+                </a:spcAft>
+                <a:buFont typeface="Arial" panose="020B0604020202020204" pitchFamily="34" charset="0"/>
+                <a:buChar char="•"/>
+              </a:pPr>
+              <a:r>
+                <a:rPr lang="en-US" sz="1000" noProof="0" dirty="0" err="1">
+                  <a:solidFill>
+                    <a:srgbClr val="333333"/>
+                  </a:solidFill>
+                </a:rPr>
+                <a:t>DevSecOps</a:t>
+              </a:r>
+              <a:r>
+                <a:rPr lang="en-US" sz="1000" noProof="0" dirty="0">
+                  <a:solidFill>
+                    <a:srgbClr val="333333"/>
+                  </a:solidFill>
+                </a:rPr>
+                <a:t> – CI/CD security platform</a:t>
+              </a:r>
+            </a:p>
+            <a:p>
+              <a:pPr marL="171450" indent="-171450" algn="l">
+                <a:spcBef>
+                  <a:spcPts val="0"/>
+                </a:spcBef>
+                <a:spcAft>
+                  <a:spcPts val="0"/>
+                </a:spcAft>
+                <a:buFont typeface="Arial" panose="020B0604020202020204" pitchFamily="34" charset="0"/>
+                <a:buChar char="•"/>
+              </a:pPr>
+              <a:r>
+                <a:rPr lang="en-US" sz="1000" noProof="0" dirty="0">
+                  <a:solidFill>
+                    <a:srgbClr val="333333"/>
+                  </a:solidFill>
+                </a:rPr>
+                <a:t>SCA</a:t>
+              </a:r>
+            </a:p>
+          </p:txBody>
+        </p:sp>
+      </p:grpSp>
     </p:spTree>
     <p:extLst>
       <p:ext uri="{BB962C8B-B14F-4D97-AF65-F5344CB8AC3E}">
